--- a/public/team_presentations/team_13_presentation.pptx
+++ b/public/team_presentations/team_13_presentation.pptx
@@ -55836,11 +55836,6 @@
               </a:rPr>
               <a:t> 	</a:t>
             </a:r>
-            <a:endParaRPr sz="1400" dirty="0">
-              <a:solidFill>
-                <a:schemeClr val="bg2"/>
-              </a:solidFill>
-            </a:endParaRPr>
           </a:p>
           <a:p>
             <a:pPr marL="0" lvl="0" indent="0" algn="l" rtl="0">
@@ -55858,7 +55853,7 @@
                   <a:schemeClr val="bg2"/>
                 </a:solidFill>
               </a:rPr>
-              <a:t>CH .Sohitha Sai		23KD1A0219</a:t>
+              <a:t>CH. Sohitha Sai		23KD1A0219</a:t>
             </a:r>
             <a:endParaRPr sz="1400" dirty="0">
               <a:solidFill>
@@ -55882,7 +55877,7 @@
                   <a:schemeClr val="bg2"/>
                 </a:solidFill>
               </a:rPr>
-              <a:t>L . Venkata Lakshmi	 	23KD1A0260</a:t>
+              <a:t>L .Venkata Lakshmi	 	23KD1A0260</a:t>
             </a:r>
             <a:endParaRPr sz="1400" dirty="0">
               <a:solidFill>
@@ -55906,7 +55901,7 @@
                   <a:schemeClr val="bg2"/>
                 </a:solidFill>
               </a:rPr>
-              <a:t>B . Ramu 			23KD1A0212</a:t>
+              <a:t>B .Ramu 			23KD1A0212</a:t>
             </a:r>
             <a:endParaRPr sz="1400" dirty="0">
               <a:solidFill>
@@ -55930,7 +55925,7 @@
                   <a:schemeClr val="bg2"/>
                 </a:solidFill>
               </a:rPr>
-              <a:t>I . Vamsi  			23KD1A0245</a:t>
+              <a:t>I .Sai Vamsi  		23KD1A0245</a:t>
             </a:r>
             <a:endParaRPr sz="1400" dirty="0">
               <a:solidFill>
@@ -58007,31 +58002,6 @@
           <a:chExt cx="0" cy="0"/>
         </a:xfrm>
       </p:grpSpPr>
-      <p:sp>
-        <p:nvSpPr>
-          <p:cNvPr id="2" name="Title 1">
-            <a:extLst>
-              <a:ext uri="{FF2B5EF4-FFF2-40B4-BE49-F238E27FC236}">
-                <a16:creationId xmlns:a16="http://schemas.microsoft.com/office/drawing/2014/main" id="{3B85A769-2127-B492-3039-57B63436B178}"/>
-              </a:ext>
-            </a:extLst>
-          </p:cNvPr>
-          <p:cNvSpPr>
-            <a:spLocks noGrp="1"/>
-          </p:cNvSpPr>
-          <p:nvPr>
-            <p:ph type="title"/>
-          </p:nvPr>
-        </p:nvSpPr>
-        <p:spPr/>
-        <p:txBody>
-          <a:bodyPr/>
-          <a:lstStyle/>
-          <a:p>
-            <a:endParaRPr lang="en-IN"/>
-          </a:p>
-        </p:txBody>
-      </p:sp>
       <p:pic>
         <p:nvPicPr>
           <p:cNvPr id="4" name="Picture 3">
@@ -60140,50 +60110,6 @@
       </p:sp>
       <p:sp>
         <p:nvSpPr>
-          <p:cNvPr id="2" name="TextBox 1">
-            <a:extLst>
-              <a:ext uri="{FF2B5EF4-FFF2-40B4-BE49-F238E27FC236}">
-                <a16:creationId xmlns:a16="http://schemas.microsoft.com/office/drawing/2014/main" id="{86E62342-1A06-4EC1-69C9-7EE7B5B0742A}"/>
-              </a:ext>
-            </a:extLst>
-          </p:cNvPr>
-          <p:cNvSpPr txBox="1"/>
-          <p:nvPr/>
-        </p:nvSpPr>
-        <p:spPr>
-          <a:xfrm>
-            <a:off x="4400550" y="3940501"/>
-            <a:ext cx="4090307" cy="400110"/>
-          </a:xfrm>
-          <a:prstGeom prst="rect">
-            <a:avLst/>
-          </a:prstGeom>
-          <a:noFill/>
-        </p:spPr>
-        <p:txBody>
-          <a:bodyPr wrap="square" rtlCol="0">
-            <a:spAutoFit/>
-          </a:bodyPr>
-          <a:lstStyle/>
-          <a:p>
-            <a:pPr marL="285750" indent="-285750">
-              <a:buFont typeface="Wingdings" panose="05000000000000000000" pitchFamily="2" charset="2"/>
-              <a:buChar char="v"/>
-            </a:pPr>
-            <a:r>
-              <a:rPr lang="en-US" sz="2000" dirty="0">
-                <a:latin typeface="Work Sans" pitchFamily="2" charset="0"/>
-              </a:rPr>
-              <a:t>TEST</a:t>
-            </a:r>
-            <a:endParaRPr lang="en-IN" sz="2000" dirty="0">
-              <a:latin typeface="Work Sans" pitchFamily="2" charset="0"/>
-            </a:endParaRPr>
-          </a:p>
-        </p:txBody>
-      </p:sp>
-      <p:sp>
-        <p:nvSpPr>
           <p:cNvPr id="3" name="TextBox 2">
             <a:extLst>
               <a:ext uri="{FF2B5EF4-FFF2-40B4-BE49-F238E27FC236}">
@@ -60196,7 +60122,7 @@
         </p:nvSpPr>
         <p:spPr>
           <a:xfrm>
-            <a:off x="4400550" y="4492817"/>
+            <a:off x="4417967" y="3878822"/>
             <a:ext cx="3200400" cy="400110"/>
           </a:xfrm>
           <a:prstGeom prst="rect">
